--- a/class/cloud_infra_mgmt/01주차_클라우드개념_Docker입문/01_강의자료/2차시_컨테이너와Docker아키텍처.pptx
+++ b/class/cloud_infra_mgmt/01주차_클라우드개념_Docker입문/01_강의자료/2차시_컨테이너와Docker아키텍처.pptx
@@ -8142,7 +8142,7 @@
               </a:lnSpc>
             </a:pPr>
             <a:r>
-              <a:rPr sz="1500" b="1">
+              <a:rPr sz="1700" b="1">
                 <a:solidFill>
                   <a:srgbClr val="0D9488"/>
                 </a:solidFill>
@@ -8151,7 +8151,7 @@
               <a:t>●  </a:t>
             </a:r>
             <a:r>
-              <a:rPr sz="1500" b="0">
+              <a:rPr sz="1700" b="0">
                 <a:solidFill>
                   <a:srgbClr val="222733"/>
                 </a:solidFill>
@@ -8167,7 +8167,7 @@
               </a:lnSpc>
             </a:pPr>
             <a:r>
-              <a:rPr sz="1500" b="1">
+              <a:rPr sz="1700" b="1">
                 <a:solidFill>
                   <a:srgbClr val="0D9488"/>
                 </a:solidFill>
@@ -8176,7 +8176,7 @@
               <a:t>●  </a:t>
             </a:r>
             <a:r>
-              <a:rPr sz="1500" b="0">
+              <a:rPr sz="1700" b="0">
                 <a:solidFill>
                   <a:srgbClr val="222733"/>
                 </a:solidFill>
@@ -8192,7 +8192,7 @@
               </a:lnSpc>
             </a:pPr>
             <a:r>
-              <a:rPr sz="1500" b="1">
+              <a:rPr sz="1700" b="1">
                 <a:solidFill>
                   <a:srgbClr val="0D9488"/>
                 </a:solidFill>
@@ -8201,7 +8201,7 @@
               <a:t>●  </a:t>
             </a:r>
             <a:r>
-              <a:rPr sz="1500" b="0">
+              <a:rPr sz="1700" b="0">
                 <a:solidFill>
                   <a:srgbClr val="222733"/>
                 </a:solidFill>

--- a/class/cloud_infra_mgmt/01주차_클라우드개념_Docker입문/01_강의자료/2차시_컨테이너와Docker아키텍처.pptx
+++ b/class/cloud_infra_mgmt/01주차_클라우드개념_Docker입문/01_강의자료/2차시_컨테이너와Docker아키텍처.pptx
@@ -5180,7 +5180,7 @@
           <a:p>
             <a:pPr>
               <a:lnSpc>
-                <a:spcPct val="115000"/>
+                <a:spcPct val="149500"/>
               </a:lnSpc>
             </a:pPr>
             <a:r>
@@ -5199,13 +5199,22 @@
                 </a:solidFill>
                 <a:latin typeface="맑은 고딕"/>
               </a:rPr>
-              <a:t>0주차 배포받은 개인 VM(cloud-lab)에 로그인</a:t>
+              <a:t>0주차 배포받은 개인 VM(cloud-lab)에 </a:t>
+            </a:r>
+            <a:r>
+              <a:rPr sz="1700" b="1">
+                <a:solidFill>
+                  <a:srgbClr val="0D9488"/>
+                </a:solidFill>
+                <a:latin typeface="맑은 고딕"/>
+              </a:rPr>
+              <a:t>로그인</a:t>
             </a:r>
           </a:p>
           <a:p>
             <a:pPr>
               <a:lnSpc>
-                <a:spcPct val="115000"/>
+                <a:spcPct val="149500"/>
               </a:lnSpc>
             </a:pPr>
             <a:r>
@@ -5230,7 +5239,7 @@
           <a:p>
             <a:pPr>
               <a:lnSpc>
-                <a:spcPct val="115000"/>
+                <a:spcPct val="149500"/>
               </a:lnSpc>
             </a:pPr>
             <a:r>
@@ -5255,7 +5264,7 @@
           <a:p>
             <a:pPr>
               <a:lnSpc>
-                <a:spcPct val="115000"/>
+                <a:spcPct val="149500"/>
               </a:lnSpc>
             </a:pPr>
             <a:r>
@@ -5274,7 +5283,25 @@
                 </a:solidFill>
                 <a:latin typeface="맑은 고딕"/>
               </a:rPr>
-              <a:t>Killercoda와 결과가 똑같이 나오는지 비교해보기</a:t>
+              <a:t>Killercoda와 결과가 똑같이 나오는지 </a:t>
+            </a:r>
+            <a:r>
+              <a:rPr sz="1700" b="1">
+                <a:solidFill>
+                  <a:srgbClr val="0D9488"/>
+                </a:solidFill>
+                <a:latin typeface="맑은 고딕"/>
+              </a:rPr>
+              <a:t>비교</a:t>
+            </a:r>
+            <a:r>
+              <a:rPr sz="1700" b="0">
+                <a:solidFill>
+                  <a:srgbClr val="222733"/>
+                </a:solidFill>
+                <a:latin typeface="맑은 고딕"/>
+              </a:rPr>
+              <a:t>해보기</a:t>
             </a:r>
           </a:p>
         </p:txBody>
@@ -6131,7 +6158,25 @@
                 </a:solidFill>
                 <a:latin typeface="맑은 고딕"/>
               </a:rPr>
-              <a:t>1.  컨테이너가 VM의 한계를 어떻게 해결하는가</a:t>
+              <a:t>1.  컨테이너가 </a:t>
+            </a:r>
+            <a:r>
+              <a:rPr sz="2000" b="1">
+                <a:solidFill>
+                  <a:srgbClr val="0D9488"/>
+                </a:solidFill>
+                <a:latin typeface="맑은 고딕"/>
+              </a:rPr>
+              <a:t>VM의 한계</a:t>
+            </a:r>
+            <a:r>
+              <a:rPr sz="2000" b="0">
+                <a:solidFill>
+                  <a:srgbClr val="222733"/>
+                </a:solidFill>
+                <a:latin typeface="맑은 고딕"/>
+              </a:rPr>
+              <a:t>를 어떻게 해결하는가</a:t>
             </a:r>
           </a:p>
           <a:p>
@@ -6147,7 +6192,25 @@
                 </a:solidFill>
                 <a:latin typeface="맑은 고딕"/>
               </a:rPr>
-              <a:t>2.  VM과 컨테이너를 정확히 비교할 수 있다</a:t>
+              <a:t>2.  VM과 컨테이너를 </a:t>
+            </a:r>
+            <a:r>
+              <a:rPr sz="2000" b="1">
+                <a:solidFill>
+                  <a:srgbClr val="0D9488"/>
+                </a:solidFill>
+                <a:latin typeface="맑은 고딕"/>
+              </a:rPr>
+              <a:t>정확히 비교</a:t>
+            </a:r>
+            <a:r>
+              <a:rPr sz="2000" b="0">
+                <a:solidFill>
+                  <a:srgbClr val="222733"/>
+                </a:solidFill>
+                <a:latin typeface="맑은 고딕"/>
+              </a:rPr>
+              <a:t>할 수 있다</a:t>
             </a:r>
           </a:p>
           <a:p>
@@ -6163,7 +6226,25 @@
                 </a:solidFill>
                 <a:latin typeface="맑은 고딕"/>
               </a:rPr>
-              <a:t>3.  Docker 아키텍처(Image·Container·Registry)를 이해한다</a:t>
+              <a:t>3.  </a:t>
+            </a:r>
+            <a:r>
+              <a:rPr sz="2000" b="1">
+                <a:solidFill>
+                  <a:srgbClr val="0D9488"/>
+                </a:solidFill>
+                <a:latin typeface="맑은 고딕"/>
+              </a:rPr>
+              <a:t>Docker 아키텍처</a:t>
+            </a:r>
+            <a:r>
+              <a:rPr sz="2000" b="0">
+                <a:solidFill>
+                  <a:srgbClr val="222733"/>
+                </a:solidFill>
+                <a:latin typeface="맑은 고딕"/>
+              </a:rPr>
+              <a:t>(Image·Container·Registry)를 이해한다</a:t>
             </a:r>
           </a:p>
           <a:p>
@@ -6179,7 +6260,25 @@
                 </a:solidFill>
                 <a:latin typeface="맑은 고딕"/>
               </a:rPr>
-              <a:t>4.  Killercoda에서 첫 Docker 명령어를 실행해본다</a:t>
+              <a:t>4.  Killercoda에서 </a:t>
+            </a:r>
+            <a:r>
+              <a:rPr sz="2000" b="1">
+                <a:solidFill>
+                  <a:srgbClr val="0D9488"/>
+                </a:solidFill>
+                <a:latin typeface="맑은 고딕"/>
+              </a:rPr>
+              <a:t>첫 Docker 명령어</a:t>
+            </a:r>
+            <a:r>
+              <a:rPr sz="2000" b="0">
+                <a:solidFill>
+                  <a:srgbClr val="222733"/>
+                </a:solidFill>
+                <a:latin typeface="맑은 고딕"/>
+              </a:rPr>
+              <a:t>를 실행해본다</a:t>
             </a:r>
           </a:p>
         </p:txBody>
@@ -6520,16 +6619,104 @@
       </p:sp>
       <p:sp>
         <p:nvSpPr>
-          <p:cNvPr id="7" name="Isosceles Triangle 6"/>
+          <p:cNvPr id="7" name="Rectangle 6"/>
           <p:cNvSpPr/>
           <p:nvPr/>
         </p:nvSpPr>
         <p:spPr>
-          <a:xfrm rot="5400000">
-            <a:off x="3495751" y="1673352"/>
-            <a:ext cx="146304" cy="146304"/>
-          </a:xfrm>
-          <a:prstGeom prst="triangle">
+          <a:xfrm>
+            <a:off x="5096865" y="1730959"/>
+            <a:ext cx="1995220" cy="31089"/>
+          </a:xfrm>
+          <a:prstGeom prst="rect">
+            <a:avLst/>
+          </a:prstGeom>
+          <a:solidFill>
+            <a:srgbClr val="14B8A6"/>
+          </a:solidFill>
+          <a:ln>
+            <a:noFill/>
+          </a:ln>
+          <a:effectLst/>
+        </p:spPr>
+        <p:style>
+          <a:lnRef idx="1">
+            <a:schemeClr val="accent1"/>
+          </a:lnRef>
+          <a:fillRef idx="3">
+            <a:schemeClr val="accent1"/>
+          </a:fillRef>
+          <a:effectRef idx="2">
+            <a:schemeClr val="accent1"/>
+          </a:effectRef>
+          <a:fontRef idx="minor">
+            <a:schemeClr val="lt1"/>
+          </a:fontRef>
+        </p:style>
+        <p:txBody>
+          <a:bodyPr rtlCol="0" anchor="ctr"/>
+          <a:lstStyle/>
+          <a:p>
+            <a:pPr algn="ctr"/>
+          </a:p>
+        </p:txBody>
+      </p:sp>
+      <p:sp>
+        <p:nvSpPr>
+          <p:cNvPr id="8" name="Rectangle 7"/>
+          <p:cNvSpPr/>
+          <p:nvPr/>
+        </p:nvSpPr>
+        <p:spPr>
+          <a:xfrm>
+            <a:off x="7622438" y="1730959"/>
+            <a:ext cx="1995220" cy="31089"/>
+          </a:xfrm>
+          <a:prstGeom prst="rect">
+            <a:avLst/>
+          </a:prstGeom>
+          <a:solidFill>
+            <a:srgbClr val="14B8A6"/>
+          </a:solidFill>
+          <a:ln>
+            <a:noFill/>
+          </a:ln>
+          <a:effectLst/>
+        </p:spPr>
+        <p:style>
+          <a:lnRef idx="1">
+            <a:schemeClr val="accent1"/>
+          </a:lnRef>
+          <a:fillRef idx="3">
+            <a:schemeClr val="accent1"/>
+          </a:fillRef>
+          <a:effectRef idx="2">
+            <a:schemeClr val="accent1"/>
+          </a:effectRef>
+          <a:fontRef idx="minor">
+            <a:schemeClr val="lt1"/>
+          </a:fontRef>
+        </p:style>
+        <p:txBody>
+          <a:bodyPr rtlCol="0" anchor="ctr"/>
+          <a:lstStyle/>
+          <a:p>
+            <a:pPr algn="ctr"/>
+          </a:p>
+        </p:txBody>
+      </p:sp>
+      <p:sp>
+        <p:nvSpPr>
+          <p:cNvPr id="9" name="Oval 8"/>
+          <p:cNvSpPr/>
+          <p:nvPr/>
+        </p:nvSpPr>
+        <p:spPr>
+          <a:xfrm>
+            <a:off x="2040940" y="1481328"/>
+            <a:ext cx="530352" cy="530352"/>
+          </a:xfrm>
+          <a:prstGeom prst="ellipse">
             <a:avLst/>
           </a:prstGeom>
           <a:solidFill>
@@ -6564,227 +6751,7 @@
       </p:sp>
       <p:sp>
         <p:nvSpPr>
-          <p:cNvPr id="8" name="Rectangle 7"/>
-          <p:cNvSpPr/>
-          <p:nvPr/>
-        </p:nvSpPr>
-        <p:spPr>
-          <a:xfrm>
-            <a:off x="5096865" y="1730959"/>
-            <a:ext cx="1995220" cy="31089"/>
-          </a:xfrm>
-          <a:prstGeom prst="rect">
-            <a:avLst/>
-          </a:prstGeom>
-          <a:solidFill>
-            <a:srgbClr val="14B8A6"/>
-          </a:solidFill>
-          <a:ln>
-            <a:noFill/>
-          </a:ln>
-          <a:effectLst/>
-        </p:spPr>
-        <p:style>
-          <a:lnRef idx="1">
-            <a:schemeClr val="accent1"/>
-          </a:lnRef>
-          <a:fillRef idx="3">
-            <a:schemeClr val="accent1"/>
-          </a:fillRef>
-          <a:effectRef idx="2">
-            <a:schemeClr val="accent1"/>
-          </a:effectRef>
-          <a:fontRef idx="minor">
-            <a:schemeClr val="lt1"/>
-          </a:fontRef>
-        </p:style>
-        <p:txBody>
-          <a:bodyPr rtlCol="0" anchor="ctr"/>
-          <a:lstStyle/>
-          <a:p>
-            <a:pPr algn="ctr"/>
-          </a:p>
-        </p:txBody>
-      </p:sp>
-      <p:sp>
-        <p:nvSpPr>
-          <p:cNvPr id="9" name="Isosceles Triangle 8"/>
-          <p:cNvSpPr/>
-          <p:nvPr/>
-        </p:nvSpPr>
-        <p:spPr>
-          <a:xfrm rot="5400000">
-            <a:off x="6021324" y="1673352"/>
-            <a:ext cx="146304" cy="146304"/>
-          </a:xfrm>
-          <a:prstGeom prst="triangle">
-            <a:avLst/>
-          </a:prstGeom>
-          <a:solidFill>
-            <a:srgbClr val="0D9488"/>
-          </a:solidFill>
-          <a:ln>
-            <a:noFill/>
-          </a:ln>
-          <a:effectLst/>
-        </p:spPr>
-        <p:style>
-          <a:lnRef idx="1">
-            <a:schemeClr val="accent1"/>
-          </a:lnRef>
-          <a:fillRef idx="3">
-            <a:schemeClr val="accent1"/>
-          </a:fillRef>
-          <a:effectRef idx="2">
-            <a:schemeClr val="accent1"/>
-          </a:effectRef>
-          <a:fontRef idx="minor">
-            <a:schemeClr val="lt1"/>
-          </a:fontRef>
-        </p:style>
-        <p:txBody>
-          <a:bodyPr rtlCol="0" anchor="ctr"/>
-          <a:lstStyle/>
-          <a:p>
-            <a:pPr algn="ctr"/>
-          </a:p>
-        </p:txBody>
-      </p:sp>
-      <p:sp>
-        <p:nvSpPr>
-          <p:cNvPr id="10" name="Rectangle 9"/>
-          <p:cNvSpPr/>
-          <p:nvPr/>
-        </p:nvSpPr>
-        <p:spPr>
-          <a:xfrm>
-            <a:off x="7622438" y="1730959"/>
-            <a:ext cx="1995220" cy="31089"/>
-          </a:xfrm>
-          <a:prstGeom prst="rect">
-            <a:avLst/>
-          </a:prstGeom>
-          <a:solidFill>
-            <a:srgbClr val="14B8A6"/>
-          </a:solidFill>
-          <a:ln>
-            <a:noFill/>
-          </a:ln>
-          <a:effectLst/>
-        </p:spPr>
-        <p:style>
-          <a:lnRef idx="1">
-            <a:schemeClr val="accent1"/>
-          </a:lnRef>
-          <a:fillRef idx="3">
-            <a:schemeClr val="accent1"/>
-          </a:fillRef>
-          <a:effectRef idx="2">
-            <a:schemeClr val="accent1"/>
-          </a:effectRef>
-          <a:fontRef idx="minor">
-            <a:schemeClr val="lt1"/>
-          </a:fontRef>
-        </p:style>
-        <p:txBody>
-          <a:bodyPr rtlCol="0" anchor="ctr"/>
-          <a:lstStyle/>
-          <a:p>
-            <a:pPr algn="ctr"/>
-          </a:p>
-        </p:txBody>
-      </p:sp>
-      <p:sp>
-        <p:nvSpPr>
-          <p:cNvPr id="11" name="Isosceles Triangle 10"/>
-          <p:cNvSpPr/>
-          <p:nvPr/>
-        </p:nvSpPr>
-        <p:spPr>
-          <a:xfrm rot="5400000">
-            <a:off x="8546896" y="1673352"/>
-            <a:ext cx="146304" cy="146304"/>
-          </a:xfrm>
-          <a:prstGeom prst="triangle">
-            <a:avLst/>
-          </a:prstGeom>
-          <a:solidFill>
-            <a:srgbClr val="0D9488"/>
-          </a:solidFill>
-          <a:ln>
-            <a:noFill/>
-          </a:ln>
-          <a:effectLst/>
-        </p:spPr>
-        <p:style>
-          <a:lnRef idx="1">
-            <a:schemeClr val="accent1"/>
-          </a:lnRef>
-          <a:fillRef idx="3">
-            <a:schemeClr val="accent1"/>
-          </a:fillRef>
-          <a:effectRef idx="2">
-            <a:schemeClr val="accent1"/>
-          </a:effectRef>
-          <a:fontRef idx="minor">
-            <a:schemeClr val="lt1"/>
-          </a:fontRef>
-        </p:style>
-        <p:txBody>
-          <a:bodyPr rtlCol="0" anchor="ctr"/>
-          <a:lstStyle/>
-          <a:p>
-            <a:pPr algn="ctr"/>
-          </a:p>
-        </p:txBody>
-      </p:sp>
-      <p:sp>
-        <p:nvSpPr>
-          <p:cNvPr id="12" name="Oval 11"/>
-          <p:cNvSpPr/>
-          <p:nvPr/>
-        </p:nvSpPr>
-        <p:spPr>
-          <a:xfrm>
-            <a:off x="2040940" y="1481328"/>
-            <a:ext cx="530352" cy="530352"/>
-          </a:xfrm>
-          <a:prstGeom prst="ellipse">
-            <a:avLst/>
-          </a:prstGeom>
-          <a:solidFill>
-            <a:srgbClr val="0D9488"/>
-          </a:solidFill>
-          <a:ln>
-            <a:noFill/>
-          </a:ln>
-          <a:effectLst/>
-        </p:spPr>
-        <p:style>
-          <a:lnRef idx="1">
-            <a:schemeClr val="accent1"/>
-          </a:lnRef>
-          <a:fillRef idx="3">
-            <a:schemeClr val="accent1"/>
-          </a:fillRef>
-          <a:effectRef idx="2">
-            <a:schemeClr val="accent1"/>
-          </a:effectRef>
-          <a:fontRef idx="minor">
-            <a:schemeClr val="lt1"/>
-          </a:fontRef>
-        </p:style>
-        <p:txBody>
-          <a:bodyPr rtlCol="0" anchor="ctr"/>
-          <a:lstStyle/>
-          <a:p>
-            <a:pPr algn="ctr"/>
-          </a:p>
-        </p:txBody>
-      </p:sp>
-      <p:sp>
-        <p:nvSpPr>
-          <p:cNvPr id="13" name="TextBox 12"/>
+          <p:cNvPr id="10" name="TextBox 9"/>
           <p:cNvSpPr txBox="1"/>
           <p:nvPr/>
         </p:nvSpPr>
@@ -6819,7 +6786,7 @@
       </p:sp>
       <p:sp>
         <p:nvSpPr>
-          <p:cNvPr id="14" name="Rounded Rectangle 13"/>
+          <p:cNvPr id="11" name="Rounded Rectangle 10"/>
           <p:cNvSpPr/>
           <p:nvPr/>
         </p:nvSpPr>
@@ -6867,7 +6834,7 @@
       </p:sp>
       <p:sp>
         <p:nvSpPr>
-          <p:cNvPr id="15" name="TextBox 14"/>
+          <p:cNvPr id="12" name="TextBox 11"/>
           <p:cNvSpPr txBox="1"/>
           <p:nvPr/>
         </p:nvSpPr>
@@ -6902,7 +6869,7 @@
       </p:sp>
       <p:sp>
         <p:nvSpPr>
-          <p:cNvPr id="16" name="TextBox 15"/>
+          <p:cNvPr id="13" name="TextBox 12"/>
           <p:cNvSpPr txBox="1"/>
           <p:nvPr/>
         </p:nvSpPr>
@@ -6941,7 +6908,7 @@
       </p:sp>
       <p:sp>
         <p:nvSpPr>
-          <p:cNvPr id="17" name="Oval 16"/>
+          <p:cNvPr id="14" name="Oval 13"/>
           <p:cNvSpPr/>
           <p:nvPr/>
         </p:nvSpPr>
@@ -6985,7 +6952,7 @@
       </p:sp>
       <p:sp>
         <p:nvSpPr>
-          <p:cNvPr id="18" name="TextBox 17"/>
+          <p:cNvPr id="15" name="TextBox 14"/>
           <p:cNvSpPr txBox="1"/>
           <p:nvPr/>
         </p:nvSpPr>
@@ -7020,7 +6987,7 @@
       </p:sp>
       <p:sp>
         <p:nvSpPr>
-          <p:cNvPr id="19" name="Rounded Rectangle 18"/>
+          <p:cNvPr id="16" name="Rounded Rectangle 15"/>
           <p:cNvSpPr/>
           <p:nvPr/>
         </p:nvSpPr>
@@ -7068,7 +7035,7 @@
       </p:sp>
       <p:sp>
         <p:nvSpPr>
-          <p:cNvPr id="20" name="TextBox 19"/>
+          <p:cNvPr id="17" name="TextBox 16"/>
           <p:cNvSpPr txBox="1"/>
           <p:nvPr/>
         </p:nvSpPr>
@@ -7103,7 +7070,7 @@
       </p:sp>
       <p:sp>
         <p:nvSpPr>
-          <p:cNvPr id="21" name="TextBox 20"/>
+          <p:cNvPr id="18" name="TextBox 17"/>
           <p:cNvSpPr txBox="1"/>
           <p:nvPr/>
         </p:nvSpPr>
@@ -7142,7 +7109,7 @@
       </p:sp>
       <p:sp>
         <p:nvSpPr>
-          <p:cNvPr id="22" name="Oval 21"/>
+          <p:cNvPr id="19" name="Oval 18"/>
           <p:cNvSpPr/>
           <p:nvPr/>
         </p:nvSpPr>
@@ -7186,7 +7153,7 @@
       </p:sp>
       <p:sp>
         <p:nvSpPr>
-          <p:cNvPr id="23" name="TextBox 22"/>
+          <p:cNvPr id="20" name="TextBox 19"/>
           <p:cNvSpPr txBox="1"/>
           <p:nvPr/>
         </p:nvSpPr>
@@ -7221,7 +7188,7 @@
       </p:sp>
       <p:sp>
         <p:nvSpPr>
-          <p:cNvPr id="24" name="Rounded Rectangle 23"/>
+          <p:cNvPr id="21" name="Rounded Rectangle 20"/>
           <p:cNvSpPr/>
           <p:nvPr/>
         </p:nvSpPr>
@@ -7269,7 +7236,7 @@
       </p:sp>
       <p:sp>
         <p:nvSpPr>
-          <p:cNvPr id="25" name="TextBox 24"/>
+          <p:cNvPr id="22" name="TextBox 21"/>
           <p:cNvSpPr txBox="1"/>
           <p:nvPr/>
         </p:nvSpPr>
@@ -7304,7 +7271,7 @@
       </p:sp>
       <p:sp>
         <p:nvSpPr>
-          <p:cNvPr id="26" name="TextBox 25"/>
+          <p:cNvPr id="23" name="TextBox 22"/>
           <p:cNvSpPr txBox="1"/>
           <p:nvPr/>
         </p:nvSpPr>
@@ -7343,7 +7310,7 @@
       </p:sp>
       <p:sp>
         <p:nvSpPr>
-          <p:cNvPr id="27" name="Oval 26"/>
+          <p:cNvPr id="24" name="Oval 23"/>
           <p:cNvSpPr/>
           <p:nvPr/>
         </p:nvSpPr>
@@ -7387,7 +7354,7 @@
       </p:sp>
       <p:sp>
         <p:nvSpPr>
-          <p:cNvPr id="28" name="TextBox 27"/>
+          <p:cNvPr id="25" name="TextBox 24"/>
           <p:cNvSpPr txBox="1"/>
           <p:nvPr/>
         </p:nvSpPr>
@@ -7422,7 +7389,7 @@
       </p:sp>
       <p:sp>
         <p:nvSpPr>
-          <p:cNvPr id="29" name="Rounded Rectangle 28"/>
+          <p:cNvPr id="26" name="Rounded Rectangle 25"/>
           <p:cNvSpPr/>
           <p:nvPr/>
         </p:nvSpPr>
@@ -7470,7 +7437,7 @@
       </p:sp>
       <p:sp>
         <p:nvSpPr>
-          <p:cNvPr id="30" name="TextBox 29"/>
+          <p:cNvPr id="27" name="TextBox 26"/>
           <p:cNvSpPr txBox="1"/>
           <p:nvPr/>
         </p:nvSpPr>
@@ -7505,7 +7472,7 @@
       </p:sp>
       <p:sp>
         <p:nvSpPr>
-          <p:cNvPr id="31" name="TextBox 30"/>
+          <p:cNvPr id="28" name="TextBox 27"/>
           <p:cNvSpPr txBox="1"/>
           <p:nvPr/>
         </p:nvSpPr>
@@ -7544,7 +7511,7 @@
       </p:sp>
       <p:sp>
         <p:nvSpPr>
-          <p:cNvPr id="32" name="TextBox 31"/>
+          <p:cNvPr id="29" name="TextBox 28"/>
           <p:cNvSpPr txBox="1"/>
           <p:nvPr/>
         </p:nvSpPr>
@@ -7579,7 +7546,7 @@
       </p:sp>
       <p:sp>
         <p:nvSpPr>
-          <p:cNvPr id="33" name="TextBox 32"/>
+          <p:cNvPr id="30" name="TextBox 29"/>
           <p:cNvSpPr txBox="1"/>
           <p:nvPr/>
         </p:nvSpPr>
@@ -7614,7 +7581,7 @@
       </p:sp>
       <p:sp>
         <p:nvSpPr>
-          <p:cNvPr id="34" name="Rectangle 33"/>
+          <p:cNvPr id="31" name="Rectangle 30"/>
           <p:cNvSpPr/>
           <p:nvPr/>
         </p:nvSpPr>
@@ -8138,7 +8105,7 @@
           <a:p>
             <a:pPr>
               <a:lnSpc>
-                <a:spcPct val="115000"/>
+                <a:spcPct val="149500"/>
               </a:lnSpc>
             </a:pPr>
             <a:r>
@@ -8157,13 +8124,22 @@
                 </a:solidFill>
                 <a:latin typeface="맑은 고딕"/>
               </a:rPr>
-              <a:t>OS를 복제하지 않고, 커널만 공유</a:t>
+              <a:t>OS를 복제하지 않고, </a:t>
+            </a:r>
+            <a:r>
+              <a:rPr sz="1700" b="1">
+                <a:solidFill>
+                  <a:srgbClr val="0D9488"/>
+                </a:solidFill>
+                <a:latin typeface="맑은 고딕"/>
+              </a:rPr>
+              <a:t>커널만 공유</a:t>
             </a:r>
           </a:p>
           <a:p>
             <a:pPr>
               <a:lnSpc>
-                <a:spcPct val="115000"/>
+                <a:spcPct val="149500"/>
               </a:lnSpc>
             </a:pPr>
             <a:r>
@@ -8182,13 +8158,31 @@
                 </a:solidFill>
                 <a:latin typeface="맑은 고딕"/>
               </a:rPr>
-              <a:t>컨테이너 = 앱 + 필요한 라이브러리만 포함</a:t>
+              <a:t>컨테이너 = </a:t>
+            </a:r>
+            <a:r>
+              <a:rPr sz="1700" b="1">
+                <a:solidFill>
+                  <a:srgbClr val="0D9488"/>
+                </a:solidFill>
+                <a:latin typeface="맑은 고딕"/>
+              </a:rPr>
+              <a:t>앱 + 필요한 라이브러리만</a:t>
+            </a:r>
+            <a:r>
+              <a:rPr sz="1700" b="0">
+                <a:solidFill>
+                  <a:srgbClr val="222733"/>
+                </a:solidFill>
+                <a:latin typeface="맑은 고딕"/>
+              </a:rPr>
+              <a:t> 포함</a:t>
             </a:r>
           </a:p>
           <a:p>
             <a:pPr>
               <a:lnSpc>
-                <a:spcPct val="115000"/>
+                <a:spcPct val="149500"/>
               </a:lnSpc>
             </a:pPr>
             <a:r>
@@ -8207,7 +8201,16 @@
                 </a:solidFill>
                 <a:latin typeface="맑은 고딕"/>
               </a:rPr>
-              <a:t>결과: 수십 MB, 부팅 1초 내외</a:t>
+              <a:t>결과: </a:t>
+            </a:r>
+            <a:r>
+              <a:rPr sz="1700" b="1">
+                <a:solidFill>
+                  <a:srgbClr val="0D9488"/>
+                </a:solidFill>
+                <a:latin typeface="맑은 고딕"/>
+              </a:rPr>
+              <a:t>수십 MB, 부팅 1초 내외</a:t>
             </a:r>
           </a:p>
         </p:txBody>
@@ -11240,7 +11243,7 @@
           <a:p>
             <a:pPr>
               <a:lnSpc>
-                <a:spcPct val="115000"/>
+                <a:spcPct val="149500"/>
               </a:lnSpc>
             </a:pPr>
             <a:r>
@@ -11253,19 +11256,28 @@
               <a:t>●  </a:t>
             </a:r>
             <a:r>
+              <a:rPr sz="1700" b="1">
+                <a:solidFill>
+                  <a:srgbClr val="0D9488"/>
+                </a:solidFill>
+                <a:latin typeface="맑은 고딕"/>
+              </a:rPr>
+              <a:t>Docker Engine</a:t>
+            </a:r>
+            <a:r>
               <a:rPr sz="1700" b="0">
                 <a:solidFill>
                   <a:srgbClr val="222733"/>
                 </a:solidFill>
                 <a:latin typeface="맑은 고딕"/>
               </a:rPr>
-              <a:t>Docker Engine – 컨테이너를 만들고 실행하는 핵심 엔진</a:t>
+              <a:t> – 컨테이너를 만들고 실행하는 핵심 엔진</a:t>
             </a:r>
           </a:p>
           <a:p>
             <a:pPr>
               <a:lnSpc>
-                <a:spcPct val="115000"/>
+                <a:spcPct val="149500"/>
               </a:lnSpc>
             </a:pPr>
             <a:r>
@@ -11278,19 +11290,28 @@
               <a:t>●  </a:t>
             </a:r>
             <a:r>
+              <a:rPr sz="1700" b="1">
+                <a:solidFill>
+                  <a:srgbClr val="0D9488"/>
+                </a:solidFill>
+                <a:latin typeface="맑은 고딕"/>
+              </a:rPr>
+              <a:t>Image</a:t>
+            </a:r>
+            <a:r>
               <a:rPr sz="1700" b="0">
                 <a:solidFill>
                   <a:srgbClr val="222733"/>
                 </a:solidFill>
                 <a:latin typeface="맑은 고딕"/>
               </a:rPr>
-              <a:t>Image – 컨테이너 실행에 필요한 모든 것을 담은 "설계도" (읽기 전용)</a:t>
+              <a:t> – 컨테이너 실행에 필요한 모든 것을 담은 "설계도" (읽기 전용)</a:t>
             </a:r>
           </a:p>
           <a:p>
             <a:pPr>
               <a:lnSpc>
-                <a:spcPct val="115000"/>
+                <a:spcPct val="149500"/>
               </a:lnSpc>
             </a:pPr>
             <a:r>
@@ -11303,19 +11324,28 @@
               <a:t>●  </a:t>
             </a:r>
             <a:r>
+              <a:rPr sz="1700" b="1">
+                <a:solidFill>
+                  <a:srgbClr val="0D9488"/>
+                </a:solidFill>
+                <a:latin typeface="맑은 고딕"/>
+              </a:rPr>
+              <a:t>Container</a:t>
+            </a:r>
+            <a:r>
               <a:rPr sz="1700" b="0">
                 <a:solidFill>
                   <a:srgbClr val="222733"/>
                 </a:solidFill>
                 <a:latin typeface="맑은 고딕"/>
               </a:rPr>
-              <a:t>Container – Image를 실제로 실행한 상태 = "실체"</a:t>
+              <a:t> – Image를 실제로 실행한 상태 = "실체"</a:t>
             </a:r>
           </a:p>
           <a:p>
             <a:pPr>
               <a:lnSpc>
-                <a:spcPct val="115000"/>
+                <a:spcPct val="149500"/>
               </a:lnSpc>
             </a:pPr>
             <a:r>
@@ -11328,13 +11358,22 @@
               <a:t>●  </a:t>
             </a:r>
             <a:r>
+              <a:rPr sz="1700" b="1">
+                <a:solidFill>
+                  <a:srgbClr val="0D9488"/>
+                </a:solidFill>
+                <a:latin typeface="맑은 고딕"/>
+              </a:rPr>
+              <a:t>Registry (Docker Hub)</a:t>
+            </a:r>
+            <a:r>
               <a:rPr sz="1700" b="0">
                 <a:solidFill>
                   <a:srgbClr val="222733"/>
                 </a:solidFill>
                 <a:latin typeface="맑은 고딕"/>
               </a:rPr>
-              <a:t>Registry (Docker Hub) – Image를 저장하고 공유하는 저장소</a:t>
+              <a:t> – Image를 저장하고 공유하는 저장소</a:t>
             </a:r>
           </a:p>
         </p:txBody>
@@ -11832,7 +11871,7 @@
           <a:p>
             <a:pPr>
               <a:lnSpc>
-                <a:spcPct val="115000"/>
+                <a:spcPct val="149500"/>
               </a:lnSpc>
             </a:pPr>
             <a:r>
@@ -11851,38 +11890,65 @@
                 </a:solidFill>
                 <a:latin typeface="맑은 고딕"/>
               </a:rPr>
-              <a:t>브라우저에서 바로 실습, 설치 불필요 (이미 Docker 설치된 상태로 제공)</a:t>
+              <a:t>브라우저에서 바로 실습, </a:t>
+            </a:r>
+            <a:r>
+              <a:rPr sz="1700" b="1">
+                <a:solidFill>
+                  <a:srgbClr val="0D9488"/>
+                </a:solidFill>
+                <a:latin typeface="맑은 고딕"/>
+              </a:rPr>
+              <a:t>설치 불필요</a:t>
+            </a:r>
+            <a:r>
+              <a:rPr sz="1700" b="0">
+                <a:solidFill>
+                  <a:srgbClr val="222733"/>
+                </a:solidFill>
+                <a:latin typeface="맑은 고딕"/>
+              </a:rPr>
+              <a:t> (이미 Docker 설치된 상태로 제공)</a:t>
             </a:r>
           </a:p>
           <a:p>
             <a:pPr>
               <a:lnSpc>
-                <a:spcPct val="115000"/>
+                <a:spcPct val="149500"/>
               </a:lnSpc>
             </a:pPr>
             <a:r>
               <a:rPr sz="1700" b="1">
                 <a:solidFill>
-                  <a:srgbClr val="0D9488"/>
+                  <a:srgbClr val="DC2626"/>
                 </a:solidFill>
                 <a:latin typeface="맑은 고딕"/>
               </a:rPr>
               <a:t>●  </a:t>
             </a:r>
             <a:r>
+              <a:rPr sz="1700" b="1">
+                <a:solidFill>
+                  <a:srgbClr val="DC2626"/>
+                </a:solidFill>
+                <a:latin typeface="맑은 고딕"/>
+              </a:rPr>
+              <a:t>60분 시간 제한</a:t>
+            </a:r>
+            <a:r>
               <a:rPr sz="1700" b="0">
                 <a:solidFill>
                   <a:srgbClr val="222733"/>
                 </a:solidFill>
                 <a:latin typeface="맑은 고딕"/>
               </a:rPr>
-              <a:t>⚠ 60분 시간 제한 있음</a:t>
+              <a:t>이 있음</a:t>
             </a:r>
           </a:p>
           <a:p>
             <a:pPr>
               <a:lnSpc>
-                <a:spcPct val="115000"/>
+                <a:spcPct val="149500"/>
               </a:lnSpc>
             </a:pPr>
             <a:r>
@@ -11907,7 +11973,7 @@
           <a:p>
             <a:pPr>
               <a:lnSpc>
-                <a:spcPct val="115000"/>
+                <a:spcPct val="149500"/>
               </a:lnSpc>
             </a:pPr>
             <a:r>
@@ -11932,7 +11998,7 @@
           <a:p>
             <a:pPr>
               <a:lnSpc>
-                <a:spcPct val="115000"/>
+                <a:spcPct val="149500"/>
               </a:lnSpc>
             </a:pPr>
             <a:r>

--- a/class/cloud_infra_mgmt/01주차_클라우드개념_Docker입문/01_강의자료/2차시_컨테이너와Docker아키텍처.pptx
+++ b/class/cloud_infra_mgmt/01주차_클라우드개념_Docker입문/01_강의자료/2차시_컨테이너와Docker아키텍처.pptx
@@ -4816,6 +4816,8 @@
                   <a:srgbClr val="14B8A6"/>
                 </a:solidFill>
                 <a:latin typeface="맑은 고딕"/>
+                <a:ea typeface="맑은 고딕"/>
+                <a:cs typeface="맑은 고딕"/>
               </a:rPr>
               <a:t>클라우드인프라관리  ·  1주차 2차시</a:t>
             </a:r>
@@ -4851,6 +4853,8 @@
                   <a:srgbClr val="FFFFFF"/>
                 </a:solidFill>
                 <a:latin typeface="맑은 고딕"/>
+                <a:ea typeface="맑은 고딕"/>
+                <a:cs typeface="맑은 고딕"/>
               </a:rPr>
               <a:t>컨테이너와 Docker 아키텍처</a:t>
             </a:r>
@@ -4886,6 +4890,8 @@
                   <a:srgbClr val="C9D3E6"/>
                 </a:solidFill>
                 <a:latin typeface="맑은 고딕"/>
+                <a:ea typeface="맑은 고딕"/>
+                <a:cs typeface="맑은 고딕"/>
               </a:rPr>
               <a:t>VM vs Container · Image·Container·Registry</a:t>
             </a:r>
@@ -4921,6 +4927,8 @@
                   <a:srgbClr val="FFFFFF"/>
                 </a:solidFill>
                 <a:latin typeface="맑은 고딕"/>
+                <a:ea typeface="맑은 고딕"/>
+                <a:cs typeface="맑은 고딕"/>
               </a:rPr>
               <a:t>영남이공대학교 김지윤교수</a:t>
             </a:r>
@@ -5080,6 +5088,8 @@
                   <a:srgbClr val="14213D"/>
                 </a:solidFill>
                 <a:latin typeface="맑은 고딕"/>
+                <a:ea typeface="맑은 고딕"/>
+                <a:cs typeface="맑은 고딕"/>
               </a:rPr>
               <a:t>03</a:t>
             </a:r>
@@ -5115,6 +5125,8 @@
                   <a:srgbClr val="14B8A6"/>
                 </a:solidFill>
                 <a:latin typeface="맑은 고딕"/>
+                <a:ea typeface="맑은 고딕"/>
+                <a:cs typeface="맑은 고딕"/>
               </a:rPr>
               <a:t>실습 안내</a:t>
             </a:r>
@@ -5150,6 +5162,8 @@
                   <a:srgbClr val="FFFFFF"/>
                 </a:solidFill>
                 <a:latin typeface="맑은 고딕"/>
+                <a:ea typeface="맑은 고딕"/>
+                <a:cs typeface="맑은 고딕"/>
               </a:rPr>
               <a:t>VM에서도 동일하게 실습하기</a:t>
             </a:r>
@@ -5189,6 +5203,8 @@
                   <a:srgbClr val="0D9488"/>
                 </a:solidFill>
                 <a:latin typeface="맑은 고딕"/>
+                <a:ea typeface="맑은 고딕"/>
+                <a:cs typeface="맑은 고딕"/>
               </a:rPr>
               <a:t>●  </a:t>
             </a:r>
@@ -5198,6 +5214,8 @@
                   <a:srgbClr val="222733"/>
                 </a:solidFill>
                 <a:latin typeface="맑은 고딕"/>
+                <a:ea typeface="맑은 고딕"/>
+                <a:cs typeface="맑은 고딕"/>
               </a:rPr>
               <a:t>0주차 배포받은 개인 VM(cloud-lab)에 </a:t>
             </a:r>
@@ -5207,6 +5225,8 @@
                   <a:srgbClr val="0D9488"/>
                 </a:solidFill>
                 <a:latin typeface="맑은 고딕"/>
+                <a:ea typeface="맑은 고딕"/>
+                <a:cs typeface="맑은 고딕"/>
               </a:rPr>
               <a:t>로그인</a:t>
             </a:r>
@@ -5223,6 +5243,8 @@
                   <a:srgbClr val="0D9488"/>
                 </a:solidFill>
                 <a:latin typeface="맑은 고딕"/>
+                <a:ea typeface="맑은 고딕"/>
+                <a:cs typeface="맑은 고딕"/>
               </a:rPr>
               <a:t>●  </a:t>
             </a:r>
@@ -5232,6 +5254,8 @@
                   <a:srgbClr val="222733"/>
                 </a:solidFill>
                 <a:latin typeface="맑은 고딕"/>
+                <a:ea typeface="맑은 고딕"/>
+                <a:cs typeface="맑은 고딕"/>
               </a:rPr>
               <a:t>docker run hello-world 실행</a:t>
             </a:r>
@@ -5248,6 +5272,8 @@
                   <a:srgbClr val="0D9488"/>
                 </a:solidFill>
                 <a:latin typeface="맑은 고딕"/>
+                <a:ea typeface="맑은 고딕"/>
+                <a:cs typeface="맑은 고딕"/>
               </a:rPr>
               <a:t>●  </a:t>
             </a:r>
@@ -5257,6 +5283,8 @@
                   <a:srgbClr val="222733"/>
                 </a:solidFill>
                 <a:latin typeface="맑은 고딕"/>
+                <a:ea typeface="맑은 고딕"/>
+                <a:cs typeface="맑은 고딕"/>
               </a:rPr>
               <a:t>docker images / docker ps -a 로 결과 확인</a:t>
             </a:r>
@@ -5273,6 +5301,8 @@
                   <a:srgbClr val="0D9488"/>
                 </a:solidFill>
                 <a:latin typeface="맑은 고딕"/>
+                <a:ea typeface="맑은 고딕"/>
+                <a:cs typeface="맑은 고딕"/>
               </a:rPr>
               <a:t>●  </a:t>
             </a:r>
@@ -5282,6 +5312,8 @@
                   <a:srgbClr val="222733"/>
                 </a:solidFill>
                 <a:latin typeface="맑은 고딕"/>
+                <a:ea typeface="맑은 고딕"/>
+                <a:cs typeface="맑은 고딕"/>
               </a:rPr>
               <a:t>Killercoda와 결과가 똑같이 나오는지 </a:t>
             </a:r>
@@ -5291,6 +5323,8 @@
                   <a:srgbClr val="0D9488"/>
                 </a:solidFill>
                 <a:latin typeface="맑은 고딕"/>
+                <a:ea typeface="맑은 고딕"/>
+                <a:cs typeface="맑은 고딕"/>
               </a:rPr>
               <a:t>비교</a:t>
             </a:r>
@@ -5300,6 +5334,8 @@
                   <a:srgbClr val="222733"/>
                 </a:solidFill>
                 <a:latin typeface="맑은 고딕"/>
+                <a:ea typeface="맑은 고딕"/>
+                <a:cs typeface="맑은 고딕"/>
               </a:rPr>
               <a:t>해보기</a:t>
             </a:r>
@@ -5335,6 +5371,8 @@
                   <a:srgbClr val="5B6373"/>
                 </a:solidFill>
                 <a:latin typeface="맑은 고딕"/>
+                <a:ea typeface="맑은 고딕"/>
+                <a:cs typeface="맑은 고딕"/>
               </a:rPr>
               <a:t>클라우드인프라관리  ·  1주차 2차시</a:t>
             </a:r>
@@ -5370,6 +5408,8 @@
                   <a:srgbClr val="5B6373"/>
                 </a:solidFill>
                 <a:latin typeface="맑은 고딕"/>
+                <a:ea typeface="맑은 고딕"/>
+                <a:cs typeface="맑은 고딕"/>
               </a:rPr>
               <a:t>10 / 11</a:t>
             </a:r>
@@ -5555,6 +5595,8 @@
                   <a:srgbClr val="FFFFFF"/>
                 </a:solidFill>
                 <a:latin typeface="맑은 고딕"/>
+                <a:ea typeface="맑은 고딕"/>
+                <a:cs typeface="맑은 고딕"/>
               </a:rPr>
               <a:t>오늘의 정리</a:t>
             </a:r>
@@ -5608,6 +5650,8 @@
                   <a:srgbClr val="14213D"/>
                 </a:solidFill>
                 <a:latin typeface="맑은 고딕"/>
+                <a:ea typeface="맑은 고딕"/>
+                <a:cs typeface="맑은 고딕"/>
               </a:rPr>
               <a:t>1</a:t>
             </a:r>
@@ -5643,6 +5687,8 @@
                   <a:srgbClr val="FFFFFF"/>
                 </a:solidFill>
                 <a:latin typeface="맑은 고딕"/>
+                <a:ea typeface="맑은 고딕"/>
+                <a:cs typeface="맑은 고딕"/>
               </a:rPr>
               <a:t>컨테이너 = OS 커널을 공유해 가볍고 빠른 가상화 방식</a:t>
             </a:r>
@@ -5696,6 +5742,8 @@
                   <a:srgbClr val="14213D"/>
                 </a:solidFill>
                 <a:latin typeface="맑은 고딕"/>
+                <a:ea typeface="맑은 고딕"/>
+                <a:cs typeface="맑은 고딕"/>
               </a:rPr>
               <a:t>2</a:t>
             </a:r>
@@ -5731,6 +5779,8 @@
                   <a:srgbClr val="FFFFFF"/>
                 </a:solidFill>
                 <a:latin typeface="맑은 고딕"/>
+                <a:ea typeface="맑은 고딕"/>
+                <a:cs typeface="맑은 고딕"/>
               </a:rPr>
               <a:t>Docker = Image를 Container로 실행하는 도구</a:t>
             </a:r>
@@ -5872,6 +5922,8 @@
                   <a:srgbClr val="FFFFFF"/>
                 </a:solidFill>
                 <a:latin typeface="맑은 고딕"/>
+                <a:ea typeface="맑은 고딕"/>
+                <a:cs typeface="맑은 고딕"/>
               </a:rPr>
               <a:t>다음 차시 예고</a:t>
             </a:r>
@@ -5907,6 +5959,8 @@
                   <a:srgbClr val="14B8A6"/>
                 </a:solidFill>
                 <a:latin typeface="맑은 고딕"/>
+                <a:ea typeface="맑은 고딕"/>
+                <a:cs typeface="맑은 고딕"/>
               </a:rPr>
               <a:t>다음 차시 예고 — 1주차 3차시</a:t>
             </a:r>
@@ -5942,6 +5996,8 @@
                   <a:srgbClr val="FFFFFF"/>
                 </a:solidFill>
                 <a:latin typeface="맑은 고딕"/>
+                <a:ea typeface="맑은 고딕"/>
+                <a:cs typeface="맑은 고딕"/>
               </a:rPr>
               <a:t>Docker 데몬이 실제로 컨테이너를 어떻게 다루는지 더 깊이 살펴보고, nginx 웹 서버 컨테이너를 직접 실행·점검(inspect)해보는 심화 실습을 진행합니다.</a:t>
             </a:r>
@@ -6083,6 +6139,8 @@
                   <a:srgbClr val="14B8A6"/>
                 </a:solidFill>
                 <a:latin typeface="맑은 고딕"/>
+                <a:ea typeface="맑은 고딕"/>
+                <a:cs typeface="맑은 고딕"/>
               </a:rPr>
               <a:t>SESSION OVERVIEW</a:t>
             </a:r>
@@ -6118,6 +6176,8 @@
                   <a:srgbClr val="FFFFFF"/>
                 </a:solidFill>
                 <a:latin typeface="맑은 고딕"/>
+                <a:ea typeface="맑은 고딕"/>
+                <a:cs typeface="맑은 고딕"/>
               </a:rPr>
               <a:t>오늘의 학습 목표</a:t>
             </a:r>
@@ -6157,6 +6217,8 @@
                   <a:srgbClr val="222733"/>
                 </a:solidFill>
                 <a:latin typeface="맑은 고딕"/>
+                <a:ea typeface="맑은 고딕"/>
+                <a:cs typeface="맑은 고딕"/>
               </a:rPr>
               <a:t>1.  컨테이너가 </a:t>
             </a:r>
@@ -6166,6 +6228,8 @@
                   <a:srgbClr val="0D9488"/>
                 </a:solidFill>
                 <a:latin typeface="맑은 고딕"/>
+                <a:ea typeface="맑은 고딕"/>
+                <a:cs typeface="맑은 고딕"/>
               </a:rPr>
               <a:t>VM의 한계</a:t>
             </a:r>
@@ -6175,6 +6239,8 @@
                   <a:srgbClr val="222733"/>
                 </a:solidFill>
                 <a:latin typeface="맑은 고딕"/>
+                <a:ea typeface="맑은 고딕"/>
+                <a:cs typeface="맑은 고딕"/>
               </a:rPr>
               <a:t>를 어떻게 해결하는가</a:t>
             </a:r>
@@ -6191,6 +6257,8 @@
                   <a:srgbClr val="222733"/>
                 </a:solidFill>
                 <a:latin typeface="맑은 고딕"/>
+                <a:ea typeface="맑은 고딕"/>
+                <a:cs typeface="맑은 고딕"/>
               </a:rPr>
               <a:t>2.  VM과 컨테이너를 </a:t>
             </a:r>
@@ -6200,6 +6268,8 @@
                   <a:srgbClr val="0D9488"/>
                 </a:solidFill>
                 <a:latin typeface="맑은 고딕"/>
+                <a:ea typeface="맑은 고딕"/>
+                <a:cs typeface="맑은 고딕"/>
               </a:rPr>
               <a:t>정확히 비교</a:t>
             </a:r>
@@ -6209,6 +6279,8 @@
                   <a:srgbClr val="222733"/>
                 </a:solidFill>
                 <a:latin typeface="맑은 고딕"/>
+                <a:ea typeface="맑은 고딕"/>
+                <a:cs typeface="맑은 고딕"/>
               </a:rPr>
               <a:t>할 수 있다</a:t>
             </a:r>
@@ -6225,6 +6297,8 @@
                   <a:srgbClr val="222733"/>
                 </a:solidFill>
                 <a:latin typeface="맑은 고딕"/>
+                <a:ea typeface="맑은 고딕"/>
+                <a:cs typeface="맑은 고딕"/>
               </a:rPr>
               <a:t>3.  </a:t>
             </a:r>
@@ -6234,6 +6308,8 @@
                   <a:srgbClr val="0D9488"/>
                 </a:solidFill>
                 <a:latin typeface="맑은 고딕"/>
+                <a:ea typeface="맑은 고딕"/>
+                <a:cs typeface="맑은 고딕"/>
               </a:rPr>
               <a:t>Docker 아키텍처</a:t>
             </a:r>
@@ -6243,6 +6319,8 @@
                   <a:srgbClr val="222733"/>
                 </a:solidFill>
                 <a:latin typeface="맑은 고딕"/>
+                <a:ea typeface="맑은 고딕"/>
+                <a:cs typeface="맑은 고딕"/>
               </a:rPr>
               <a:t>(Image·Container·Registry)를 이해한다</a:t>
             </a:r>
@@ -6259,6 +6337,8 @@
                   <a:srgbClr val="222733"/>
                 </a:solidFill>
                 <a:latin typeface="맑은 고딕"/>
+                <a:ea typeface="맑은 고딕"/>
+                <a:cs typeface="맑은 고딕"/>
               </a:rPr>
               <a:t>4.  Killercoda에서 </a:t>
             </a:r>
@@ -6268,6 +6348,8 @@
                   <a:srgbClr val="0D9488"/>
                 </a:solidFill>
                 <a:latin typeface="맑은 고딕"/>
+                <a:ea typeface="맑은 고딕"/>
+                <a:cs typeface="맑은 고딕"/>
               </a:rPr>
               <a:t>첫 Docker 명령어</a:t>
             </a:r>
@@ -6277,6 +6359,8 @@
                   <a:srgbClr val="222733"/>
                 </a:solidFill>
                 <a:latin typeface="맑은 고딕"/>
+                <a:ea typeface="맑은 고딕"/>
+                <a:cs typeface="맑은 고딕"/>
               </a:rPr>
               <a:t>를 실행해본다</a:t>
             </a:r>
@@ -6312,6 +6396,8 @@
                   <a:srgbClr val="5B6373"/>
                 </a:solidFill>
                 <a:latin typeface="맑은 고딕"/>
+                <a:ea typeface="맑은 고딕"/>
+                <a:cs typeface="맑은 고딕"/>
               </a:rPr>
               <a:t>클라우드인프라관리  ·  1주차 2차시</a:t>
             </a:r>
@@ -6347,6 +6433,8 @@
                   <a:srgbClr val="5B6373"/>
                 </a:solidFill>
                 <a:latin typeface="맑은 고딕"/>
+                <a:ea typeface="맑은 고딕"/>
+                <a:cs typeface="맑은 고딕"/>
               </a:rPr>
               <a:t>02 / 11</a:t>
             </a:r>
@@ -6532,6 +6620,8 @@
                   <a:srgbClr val="14B8A6"/>
                 </a:solidFill>
                 <a:latin typeface="맑은 고딕"/>
+                <a:ea typeface="맑은 고딕"/>
+                <a:cs typeface="맑은 고딕"/>
               </a:rPr>
               <a:t>SESSION OVERVIEW</a:t>
             </a:r>
@@ -6567,6 +6657,8 @@
                   <a:srgbClr val="FFFFFF"/>
                 </a:solidFill>
                 <a:latin typeface="맑은 고딕"/>
+                <a:ea typeface="맑은 고딕"/>
+                <a:cs typeface="맑은 고딕"/>
               </a:rPr>
               <a:t>오늘의 진행 순서</a:t>
             </a:r>
@@ -6778,6 +6870,8 @@
                   <a:srgbClr val="FFFFFF"/>
                 </a:solidFill>
                 <a:latin typeface="맑은 고딕"/>
+                <a:ea typeface="맑은 고딕"/>
+                <a:cs typeface="맑은 고딕"/>
               </a:rPr>
               <a:t>1</a:t>
             </a:r>
@@ -6861,6 +6955,8 @@
                   <a:srgbClr val="14213D"/>
                 </a:solidFill>
                 <a:latin typeface="맑은 고딕"/>
+                <a:ea typeface="맑은 고딕"/>
+                <a:cs typeface="맑은 고딕"/>
               </a:rPr>
               <a:t>개념 설명</a:t>
             </a:r>
@@ -6900,6 +6996,8 @@
                   <a:srgbClr val="222733"/>
                 </a:solidFill>
                 <a:latin typeface="맑은 고딕"/>
+                <a:ea typeface="맑은 고딕"/>
+                <a:cs typeface="맑은 고딕"/>
               </a:rPr>
               <a:t>강의자료 기반 직접 강의</a:t>
             </a:r>
@@ -6979,6 +7077,8 @@
                   <a:srgbClr val="FFFFFF"/>
                 </a:solidFill>
                 <a:latin typeface="맑은 고딕"/>
+                <a:ea typeface="맑은 고딕"/>
+                <a:cs typeface="맑은 고딕"/>
               </a:rPr>
               <a:t>2</a:t>
             </a:r>
@@ -7062,6 +7162,8 @@
                   <a:srgbClr val="14213D"/>
                 </a:solidFill>
                 <a:latin typeface="맑은 고딕"/>
+                <a:ea typeface="맑은 고딕"/>
+                <a:cs typeface="맑은 고딕"/>
               </a:rPr>
               <a:t>Killercoda</a:t>
             </a:r>
@@ -7101,6 +7203,8 @@
                   <a:srgbClr val="222733"/>
                 </a:solidFill>
                 <a:latin typeface="맑은 고딕"/>
+                <a:ea typeface="맑은 고딕"/>
+                <a:cs typeface="맑은 고딕"/>
               </a:rPr>
               <a:t>docker run hello-world 실습</a:t>
             </a:r>
@@ -7180,6 +7284,8 @@
                   <a:srgbClr val="FFFFFF"/>
                 </a:solidFill>
                 <a:latin typeface="맑은 고딕"/>
+                <a:ea typeface="맑은 고딕"/>
+                <a:cs typeface="맑은 고딕"/>
               </a:rPr>
               <a:t>3</a:t>
             </a:r>
@@ -7263,6 +7369,8 @@
                   <a:srgbClr val="14213D"/>
                 </a:solidFill>
                 <a:latin typeface="맑은 고딕"/>
+                <a:ea typeface="맑은 고딕"/>
+                <a:cs typeface="맑은 고딕"/>
               </a:rPr>
               <a:t>VM 안내</a:t>
             </a:r>
@@ -7302,6 +7410,8 @@
                   <a:srgbClr val="222733"/>
                 </a:solidFill>
                 <a:latin typeface="맑은 고딕"/>
+                <a:ea typeface="맑은 고딕"/>
+                <a:cs typeface="맑은 고딕"/>
               </a:rPr>
               <a:t>VM에서 동일 실습 안내</a:t>
             </a:r>
@@ -7381,6 +7491,8 @@
                   <a:srgbClr val="FFFFFF"/>
                 </a:solidFill>
                 <a:latin typeface="맑은 고딕"/>
+                <a:ea typeface="맑은 고딕"/>
+                <a:cs typeface="맑은 고딕"/>
               </a:rPr>
               <a:t>4</a:t>
             </a:r>
@@ -7464,6 +7576,8 @@
                   <a:srgbClr val="14213D"/>
                 </a:solidFill>
                 <a:latin typeface="맑은 고딕"/>
+                <a:ea typeface="맑은 고딕"/>
+                <a:cs typeface="맑은 고딕"/>
               </a:rPr>
               <a:t>결과 제출</a:t>
             </a:r>
@@ -7503,6 +7617,8 @@
                   <a:srgbClr val="222733"/>
                 </a:solidFill>
                 <a:latin typeface="맑은 고딕"/>
+                <a:ea typeface="맑은 고딕"/>
+                <a:cs typeface="맑은 고딕"/>
               </a:rPr>
               <a:t>체크리스트 제출</a:t>
             </a:r>
@@ -7538,6 +7654,8 @@
                   <a:srgbClr val="5B6373"/>
                 </a:solidFill>
                 <a:latin typeface="맑은 고딕"/>
+                <a:ea typeface="맑은 고딕"/>
+                <a:cs typeface="맑은 고딕"/>
               </a:rPr>
               <a:t>클라우드인프라관리  ·  1주차 2차시</a:t>
             </a:r>
@@ -7573,6 +7691,8 @@
                   <a:srgbClr val="5B6373"/>
                 </a:solidFill>
                 <a:latin typeface="맑은 고딕"/>
+                <a:ea typeface="맑은 고딕"/>
+                <a:cs typeface="맑은 고딕"/>
               </a:rPr>
               <a:t>03 / 11</a:t>
             </a:r>
@@ -7776,6 +7896,8 @@
                   <a:srgbClr val="14213D"/>
                 </a:solidFill>
                 <a:latin typeface="맑은 고딕"/>
+                <a:ea typeface="맑은 고딕"/>
+                <a:cs typeface="맑은 고딕"/>
               </a:rPr>
               <a:t>PART 01</a:t>
             </a:r>
@@ -7811,6 +7933,8 @@
                   <a:srgbClr val="FFFFFF"/>
                 </a:solidFill>
                 <a:latin typeface="맑은 고딕"/>
+                <a:ea typeface="맑은 고딕"/>
+                <a:cs typeface="맑은 고딕"/>
               </a:rPr>
               <a:t>컨테이너란?</a:t>
             </a:r>
@@ -7846,6 +7970,8 @@
                   <a:srgbClr val="C9D3E6"/>
                 </a:solidFill>
                 <a:latin typeface="맑은 고딕"/>
+                <a:ea typeface="맑은 고딕"/>
+                <a:cs typeface="맑은 고딕"/>
               </a:rPr>
               <a:t>OS 커널을 공유하는 가벼운 가상화</a:t>
             </a:r>
@@ -8005,6 +8131,8 @@
                   <a:srgbClr val="14213D"/>
                 </a:solidFill>
                 <a:latin typeface="맑은 고딕"/>
+                <a:ea typeface="맑은 고딕"/>
+                <a:cs typeface="맑은 고딕"/>
               </a:rPr>
               <a:t>01</a:t>
             </a:r>
@@ -8040,6 +8168,8 @@
                   <a:srgbClr val="14B8A6"/>
                 </a:solidFill>
                 <a:latin typeface="맑은 고딕"/>
+                <a:ea typeface="맑은 고딕"/>
+                <a:cs typeface="맑은 고딕"/>
               </a:rPr>
               <a:t>PART 1 · 컨테이너란?</a:t>
             </a:r>
@@ -8075,6 +8205,8 @@
                   <a:srgbClr val="FFFFFF"/>
                 </a:solidFill>
                 <a:latin typeface="맑은 고딕"/>
+                <a:ea typeface="맑은 고딕"/>
+                <a:cs typeface="맑은 고딕"/>
               </a:rPr>
               <a:t>컨테이너 구조 — OS 커널을 공유한다</a:t>
             </a:r>
@@ -8114,6 +8246,8 @@
                   <a:srgbClr val="0D9488"/>
                 </a:solidFill>
                 <a:latin typeface="맑은 고딕"/>
+                <a:ea typeface="맑은 고딕"/>
+                <a:cs typeface="맑은 고딕"/>
               </a:rPr>
               <a:t>●  </a:t>
             </a:r>
@@ -8123,6 +8257,8 @@
                   <a:srgbClr val="222733"/>
                 </a:solidFill>
                 <a:latin typeface="맑은 고딕"/>
+                <a:ea typeface="맑은 고딕"/>
+                <a:cs typeface="맑은 고딕"/>
               </a:rPr>
               <a:t>OS를 복제하지 않고, </a:t>
             </a:r>
@@ -8132,6 +8268,8 @@
                   <a:srgbClr val="0D9488"/>
                 </a:solidFill>
                 <a:latin typeface="맑은 고딕"/>
+                <a:ea typeface="맑은 고딕"/>
+                <a:cs typeface="맑은 고딕"/>
               </a:rPr>
               <a:t>커널만 공유</a:t>
             </a:r>
@@ -8148,6 +8286,8 @@
                   <a:srgbClr val="0D9488"/>
                 </a:solidFill>
                 <a:latin typeface="맑은 고딕"/>
+                <a:ea typeface="맑은 고딕"/>
+                <a:cs typeface="맑은 고딕"/>
               </a:rPr>
               <a:t>●  </a:t>
             </a:r>
@@ -8157,6 +8297,8 @@
                   <a:srgbClr val="222733"/>
                 </a:solidFill>
                 <a:latin typeface="맑은 고딕"/>
+                <a:ea typeface="맑은 고딕"/>
+                <a:cs typeface="맑은 고딕"/>
               </a:rPr>
               <a:t>컨테이너 = </a:t>
             </a:r>
@@ -8166,6 +8308,8 @@
                   <a:srgbClr val="0D9488"/>
                 </a:solidFill>
                 <a:latin typeface="맑은 고딕"/>
+                <a:ea typeface="맑은 고딕"/>
+                <a:cs typeface="맑은 고딕"/>
               </a:rPr>
               <a:t>앱 + 필요한 라이브러리만</a:t>
             </a:r>
@@ -8175,6 +8319,8 @@
                   <a:srgbClr val="222733"/>
                 </a:solidFill>
                 <a:latin typeface="맑은 고딕"/>
+                <a:ea typeface="맑은 고딕"/>
+                <a:cs typeface="맑은 고딕"/>
               </a:rPr>
               <a:t> 포함</a:t>
             </a:r>
@@ -8191,6 +8337,8 @@
                   <a:srgbClr val="0D9488"/>
                 </a:solidFill>
                 <a:latin typeface="맑은 고딕"/>
+                <a:ea typeface="맑은 고딕"/>
+                <a:cs typeface="맑은 고딕"/>
               </a:rPr>
               <a:t>●  </a:t>
             </a:r>
@@ -8200,6 +8348,8 @@
                   <a:srgbClr val="222733"/>
                 </a:solidFill>
                 <a:latin typeface="맑은 고딕"/>
+                <a:ea typeface="맑은 고딕"/>
+                <a:cs typeface="맑은 고딕"/>
               </a:rPr>
               <a:t>결과: </a:t>
             </a:r>
@@ -8209,6 +8359,8 @@
                   <a:srgbClr val="0D9488"/>
                 </a:solidFill>
                 <a:latin typeface="맑은 고딕"/>
+                <a:ea typeface="맑은 고딕"/>
+                <a:cs typeface="맑은 고딕"/>
               </a:rPr>
               <a:t>수십 MB, 부팅 1초 내외</a:t>
             </a:r>
@@ -8244,6 +8396,8 @@
                   <a:srgbClr val="14213D"/>
                 </a:solidFill>
                 <a:latin typeface="맑은 고딕"/>
+                <a:ea typeface="맑은 고딕"/>
+                <a:cs typeface="맑은 고딕"/>
               </a:rPr>
               <a:t>컨테이너 구조</a:t>
             </a:r>
@@ -8323,6 +8477,8 @@
                   <a:srgbClr val="FFFFFF"/>
                 </a:solidFill>
                 <a:latin typeface="맑은 고딕"/>
+                <a:ea typeface="맑은 고딕"/>
+                <a:cs typeface="맑은 고딕"/>
               </a:rPr>
               <a:t>App A</a:t>
             </a:r>
@@ -8402,6 +8558,8 @@
                   <a:srgbClr val="FFFFFF"/>
                 </a:solidFill>
                 <a:latin typeface="맑은 고딕"/>
+                <a:ea typeface="맑은 고딕"/>
+                <a:cs typeface="맑은 고딕"/>
               </a:rPr>
               <a:t>App B</a:t>
             </a:r>
@@ -8481,6 +8639,8 @@
                   <a:srgbClr val="FFFFFF"/>
                 </a:solidFill>
                 <a:latin typeface="맑은 고딕"/>
+                <a:ea typeface="맑은 고딕"/>
+                <a:cs typeface="맑은 고딕"/>
               </a:rPr>
               <a:t>App C</a:t>
             </a:r>
@@ -8560,6 +8720,8 @@
                   <a:srgbClr val="FFFFFF"/>
                 </a:solidFill>
                 <a:latin typeface="맑은 고딕"/>
+                <a:ea typeface="맑은 고딕"/>
+                <a:cs typeface="맑은 고딕"/>
               </a:rPr>
               <a:t>Docker Engine</a:t>
             </a:r>
@@ -8639,6 +8801,8 @@
                   <a:srgbClr val="FFFFFF"/>
                 </a:solidFill>
                 <a:latin typeface="맑은 고딕"/>
+                <a:ea typeface="맑은 고딕"/>
+                <a:cs typeface="맑은 고딕"/>
               </a:rPr>
               <a:t>Host OS / 물리 서버(Hardware)</a:t>
             </a:r>
@@ -8674,6 +8838,8 @@
                   <a:srgbClr val="5B6373"/>
                 </a:solidFill>
                 <a:latin typeface="맑은 고딕"/>
+                <a:ea typeface="맑은 고딕"/>
+                <a:cs typeface="맑은 고딕"/>
               </a:rPr>
               <a:t>클라우드인프라관리  ·  1주차 2차시</a:t>
             </a:r>
@@ -8709,6 +8875,8 @@
                   <a:srgbClr val="5B6373"/>
                 </a:solidFill>
                 <a:latin typeface="맑은 고딕"/>
+                <a:ea typeface="맑은 고딕"/>
+                <a:cs typeface="맑은 고딕"/>
               </a:rPr>
               <a:t>05 / 11</a:t>
             </a:r>
@@ -8912,6 +9080,8 @@
                   <a:srgbClr val="14213D"/>
                 </a:solidFill>
                 <a:latin typeface="맑은 고딕"/>
+                <a:ea typeface="맑은 고딕"/>
+                <a:cs typeface="맑은 고딕"/>
               </a:rPr>
               <a:t>01</a:t>
             </a:r>
@@ -8947,6 +9117,8 @@
                   <a:srgbClr val="14B8A6"/>
                 </a:solidFill>
                 <a:latin typeface="맑은 고딕"/>
+                <a:ea typeface="맑은 고딕"/>
+                <a:cs typeface="맑은 고딕"/>
               </a:rPr>
               <a:t>PART 1 · 컨테이너란?</a:t>
             </a:r>
@@ -8982,6 +9154,8 @@
                   <a:srgbClr val="FFFFFF"/>
                 </a:solidFill>
                 <a:latin typeface="맑은 고딕"/>
+                <a:ea typeface="맑은 고딕"/>
+                <a:cs typeface="맑은 고딕"/>
               </a:rPr>
               <a:t>VM vs 컨테이너, 한눈에 비교</a:t>
             </a:r>
@@ -9061,6 +9235,8 @@
                   <a:srgbClr val="FFFFFF"/>
                 </a:solidFill>
                 <a:latin typeface="맑은 고딕"/>
+                <a:ea typeface="맑은 고딕"/>
+                <a:cs typeface="맑은 고딕"/>
               </a:rPr>
               <a:t>구분</a:t>
             </a:r>
@@ -9140,6 +9316,8 @@
                   <a:srgbClr val="FFFFFF"/>
                 </a:solidFill>
                 <a:latin typeface="맑은 고딕"/>
+                <a:ea typeface="맑은 고딕"/>
+                <a:cs typeface="맑은 고딕"/>
               </a:rPr>
               <a:t>가상머신 (VM)</a:t>
             </a:r>
@@ -9219,6 +9397,8 @@
                   <a:srgbClr val="FFFFFF"/>
                 </a:solidFill>
                 <a:latin typeface="맑은 고딕"/>
+                <a:ea typeface="맑은 고딕"/>
+                <a:cs typeface="맑은 고딕"/>
               </a:rPr>
               <a:t>컨테이너 (Container)</a:t>
             </a:r>
@@ -9298,6 +9478,8 @@
                   <a:srgbClr val="14213D"/>
                 </a:solidFill>
                 <a:latin typeface="맑은 고딕"/>
+                <a:ea typeface="맑은 고딕"/>
+                <a:cs typeface="맑은 고딕"/>
               </a:rPr>
               <a:t>가상화 단위</a:t>
             </a:r>
@@ -9377,6 +9559,8 @@
                   <a:srgbClr val="222733"/>
                 </a:solidFill>
                 <a:latin typeface="맑은 고딕"/>
+                <a:ea typeface="맑은 고딕"/>
+                <a:cs typeface="맑은 고딕"/>
               </a:rPr>
               <a:t>하드웨어 전체</a:t>
             </a:r>
@@ -9456,6 +9640,8 @@
                   <a:srgbClr val="222733"/>
                 </a:solidFill>
                 <a:latin typeface="맑은 고딕"/>
+                <a:ea typeface="맑은 고딕"/>
+                <a:cs typeface="맑은 고딕"/>
               </a:rPr>
               <a:t>운영체제(OS) 커널</a:t>
             </a:r>
@@ -9535,6 +9721,8 @@
                   <a:srgbClr val="14213D"/>
                 </a:solidFill>
                 <a:latin typeface="맑은 고딕"/>
+                <a:ea typeface="맑은 고딕"/>
+                <a:cs typeface="맑은 고딕"/>
               </a:rPr>
               <a:t>포함 요소</a:t>
             </a:r>
@@ -9614,6 +9802,8 @@
                   <a:srgbClr val="222733"/>
                 </a:solidFill>
                 <a:latin typeface="맑은 고딕"/>
+                <a:ea typeface="맑은 고딕"/>
+                <a:cs typeface="맑은 고딕"/>
               </a:rPr>
               <a:t>OS 전체 + 애플리케이션</a:t>
             </a:r>
@@ -9693,6 +9883,8 @@
                   <a:srgbClr val="222733"/>
                 </a:solidFill>
                 <a:latin typeface="맑은 고딕"/>
+                <a:ea typeface="맑은 고딕"/>
+                <a:cs typeface="맑은 고딕"/>
               </a:rPr>
               <a:t>애플리케이션 + 필요한 라이브러리</a:t>
             </a:r>
@@ -9772,6 +9964,8 @@
                   <a:srgbClr val="14213D"/>
                 </a:solidFill>
                 <a:latin typeface="맑은 고딕"/>
+                <a:ea typeface="맑은 고딕"/>
+                <a:cs typeface="맑은 고딕"/>
               </a:rPr>
               <a:t>용량</a:t>
             </a:r>
@@ -9851,6 +10045,8 @@
                   <a:srgbClr val="222733"/>
                 </a:solidFill>
                 <a:latin typeface="맑은 고딕"/>
+                <a:ea typeface="맑은 고딕"/>
+                <a:cs typeface="맑은 고딕"/>
               </a:rPr>
               <a:t>수 GB ~ 수십 GB</a:t>
             </a:r>
@@ -9930,6 +10126,8 @@
                   <a:srgbClr val="222733"/>
                 </a:solidFill>
                 <a:latin typeface="맑은 고딕"/>
+                <a:ea typeface="맑은 고딕"/>
+                <a:cs typeface="맑은 고딕"/>
               </a:rPr>
               <a:t>수십 MB ~ 수백 MB</a:t>
             </a:r>
@@ -10009,6 +10207,8 @@
                   <a:srgbClr val="14213D"/>
                 </a:solidFill>
                 <a:latin typeface="맑은 고딕"/>
+                <a:ea typeface="맑은 고딕"/>
+                <a:cs typeface="맑은 고딕"/>
               </a:rPr>
               <a:t>부팅 속도</a:t>
             </a:r>
@@ -10088,6 +10288,8 @@
                   <a:srgbClr val="222733"/>
                 </a:solidFill>
                 <a:latin typeface="맑은 고딕"/>
+                <a:ea typeface="맑은 고딕"/>
+                <a:cs typeface="맑은 고딕"/>
               </a:rPr>
               <a:t>수십 초 ~ 수 분</a:t>
             </a:r>
@@ -10167,6 +10369,8 @@
                   <a:srgbClr val="222733"/>
                 </a:solidFill>
                 <a:latin typeface="맑은 고딕"/>
+                <a:ea typeface="맑은 고딕"/>
+                <a:cs typeface="맑은 고딕"/>
               </a:rPr>
               <a:t>1초 내외</a:t>
             </a:r>
@@ -10246,6 +10450,8 @@
                   <a:srgbClr val="14213D"/>
                 </a:solidFill>
                 <a:latin typeface="맑은 고딕"/>
+                <a:ea typeface="맑은 고딕"/>
+                <a:cs typeface="맑은 고딕"/>
               </a:rPr>
               <a:t>격리 수준</a:t>
             </a:r>
@@ -10325,6 +10531,8 @@
                   <a:srgbClr val="222733"/>
                 </a:solidFill>
                 <a:latin typeface="맑은 고딕"/>
+                <a:ea typeface="맑은 고딕"/>
+                <a:cs typeface="맑은 고딕"/>
               </a:rPr>
               <a:t>강함 (완전 격리)</a:t>
             </a:r>
@@ -10404,6 +10612,8 @@
                   <a:srgbClr val="222733"/>
                 </a:solidFill>
                 <a:latin typeface="맑은 고딕"/>
+                <a:ea typeface="맑은 고딕"/>
+                <a:cs typeface="맑은 고딕"/>
               </a:rPr>
               <a:t>상대적으로 약함 (커널 공유)</a:t>
             </a:r>
@@ -10483,6 +10693,8 @@
                   <a:srgbClr val="14213D"/>
                 </a:solidFill>
                 <a:latin typeface="맑은 고딕"/>
+                <a:ea typeface="맑은 고딕"/>
+                <a:cs typeface="맑은 고딕"/>
               </a:rPr>
               <a:t>대표 기술</a:t>
             </a:r>
@@ -10562,6 +10774,8 @@
                   <a:srgbClr val="222733"/>
                 </a:solidFill>
                 <a:latin typeface="맑은 고딕"/>
+                <a:ea typeface="맑은 고딕"/>
+                <a:cs typeface="맑은 고딕"/>
               </a:rPr>
               <a:t>VMware, VirtualBox, Hyper-V</a:t>
             </a:r>
@@ -10641,6 +10855,8 @@
                   <a:srgbClr val="222733"/>
                 </a:solidFill>
                 <a:latin typeface="맑은 고딕"/>
+                <a:ea typeface="맑은 고딕"/>
+                <a:cs typeface="맑은 고딕"/>
               </a:rPr>
               <a:t>Docker, Podman</a:t>
             </a:r>
@@ -10676,6 +10892,8 @@
                   <a:srgbClr val="5B6373"/>
                 </a:solidFill>
                 <a:latin typeface="맑은 고딕"/>
+                <a:ea typeface="맑은 고딕"/>
+                <a:cs typeface="맑은 고딕"/>
               </a:rPr>
               <a:t>클라우드인프라관리  ·  1주차 2차시</a:t>
             </a:r>
@@ -10711,6 +10929,8 @@
                   <a:srgbClr val="5B6373"/>
                 </a:solidFill>
                 <a:latin typeface="맑은 고딕"/>
+                <a:ea typeface="맑은 고딕"/>
+                <a:cs typeface="맑은 고딕"/>
               </a:rPr>
               <a:t>06 / 11</a:t>
             </a:r>
@@ -10914,6 +11134,8 @@
                   <a:srgbClr val="14213D"/>
                 </a:solidFill>
                 <a:latin typeface="맑은 고딕"/>
+                <a:ea typeface="맑은 고딕"/>
+                <a:cs typeface="맑은 고딕"/>
               </a:rPr>
               <a:t>PART 02</a:t>
             </a:r>
@@ -10949,6 +11171,8 @@
                   <a:srgbClr val="FFFFFF"/>
                 </a:solidFill>
                 <a:latin typeface="맑은 고딕"/>
+                <a:ea typeface="맑은 고딕"/>
+                <a:cs typeface="맑은 고딕"/>
               </a:rPr>
               <a:t>Docker 아키텍처</a:t>
             </a:r>
@@ -10984,6 +11208,8 @@
                   <a:srgbClr val="C9D3E6"/>
                 </a:solidFill>
                 <a:latin typeface="맑은 고딕"/>
+                <a:ea typeface="맑은 고딕"/>
+                <a:cs typeface="맑은 고딕"/>
               </a:rPr>
               <a:t>Image · Container · Registry</a:t>
             </a:r>
@@ -11143,6 +11369,8 @@
                   <a:srgbClr val="14213D"/>
                 </a:solidFill>
                 <a:latin typeface="맑은 고딕"/>
+                <a:ea typeface="맑은 고딕"/>
+                <a:cs typeface="맑은 고딕"/>
               </a:rPr>
               <a:t>02</a:t>
             </a:r>
@@ -11178,6 +11406,8 @@
                   <a:srgbClr val="14B8A6"/>
                 </a:solidFill>
                 <a:latin typeface="맑은 고딕"/>
+                <a:ea typeface="맑은 고딕"/>
+                <a:cs typeface="맑은 고딕"/>
               </a:rPr>
               <a:t>PART 2 · Docker 아키텍처</a:t>
             </a:r>
@@ -11213,6 +11443,8 @@
                   <a:srgbClr val="FFFFFF"/>
                 </a:solidFill>
                 <a:latin typeface="맑은 고딕"/>
+                <a:ea typeface="맑은 고딕"/>
+                <a:cs typeface="맑은 고딕"/>
               </a:rPr>
               <a:t>Docker 아키텍처 — Image, Container, Registry</a:t>
             </a:r>
@@ -11252,6 +11484,8 @@
                   <a:srgbClr val="0D9488"/>
                 </a:solidFill>
                 <a:latin typeface="맑은 고딕"/>
+                <a:ea typeface="맑은 고딕"/>
+                <a:cs typeface="맑은 고딕"/>
               </a:rPr>
               <a:t>●  </a:t>
             </a:r>
@@ -11261,6 +11495,8 @@
                   <a:srgbClr val="0D9488"/>
                 </a:solidFill>
                 <a:latin typeface="맑은 고딕"/>
+                <a:ea typeface="맑은 고딕"/>
+                <a:cs typeface="맑은 고딕"/>
               </a:rPr>
               <a:t>Docker Engine</a:t>
             </a:r>
@@ -11270,6 +11506,8 @@
                   <a:srgbClr val="222733"/>
                 </a:solidFill>
                 <a:latin typeface="맑은 고딕"/>
+                <a:ea typeface="맑은 고딕"/>
+                <a:cs typeface="맑은 고딕"/>
               </a:rPr>
               <a:t> – 컨테이너를 만들고 실행하는 핵심 엔진</a:t>
             </a:r>
@@ -11286,6 +11524,8 @@
                   <a:srgbClr val="0D9488"/>
                 </a:solidFill>
                 <a:latin typeface="맑은 고딕"/>
+                <a:ea typeface="맑은 고딕"/>
+                <a:cs typeface="맑은 고딕"/>
               </a:rPr>
               <a:t>●  </a:t>
             </a:r>
@@ -11295,6 +11535,8 @@
                   <a:srgbClr val="0D9488"/>
                 </a:solidFill>
                 <a:latin typeface="맑은 고딕"/>
+                <a:ea typeface="맑은 고딕"/>
+                <a:cs typeface="맑은 고딕"/>
               </a:rPr>
               <a:t>Image</a:t>
             </a:r>
@@ -11304,6 +11546,8 @@
                   <a:srgbClr val="222733"/>
                 </a:solidFill>
                 <a:latin typeface="맑은 고딕"/>
+                <a:ea typeface="맑은 고딕"/>
+                <a:cs typeface="맑은 고딕"/>
               </a:rPr>
               <a:t> – 컨테이너 실행에 필요한 모든 것을 담은 "설계도" (읽기 전용)</a:t>
             </a:r>
@@ -11320,6 +11564,8 @@
                   <a:srgbClr val="0D9488"/>
                 </a:solidFill>
                 <a:latin typeface="맑은 고딕"/>
+                <a:ea typeface="맑은 고딕"/>
+                <a:cs typeface="맑은 고딕"/>
               </a:rPr>
               <a:t>●  </a:t>
             </a:r>
@@ -11329,6 +11575,8 @@
                   <a:srgbClr val="0D9488"/>
                 </a:solidFill>
                 <a:latin typeface="맑은 고딕"/>
+                <a:ea typeface="맑은 고딕"/>
+                <a:cs typeface="맑은 고딕"/>
               </a:rPr>
               <a:t>Container</a:t>
             </a:r>
@@ -11338,6 +11586,8 @@
                   <a:srgbClr val="222733"/>
                 </a:solidFill>
                 <a:latin typeface="맑은 고딕"/>
+                <a:ea typeface="맑은 고딕"/>
+                <a:cs typeface="맑은 고딕"/>
               </a:rPr>
               <a:t> – Image를 실제로 실행한 상태 = "실체"</a:t>
             </a:r>
@@ -11354,6 +11604,8 @@
                   <a:srgbClr val="0D9488"/>
                 </a:solidFill>
                 <a:latin typeface="맑은 고딕"/>
+                <a:ea typeface="맑은 고딕"/>
+                <a:cs typeface="맑은 고딕"/>
               </a:rPr>
               <a:t>●  </a:t>
             </a:r>
@@ -11363,6 +11615,8 @@
                   <a:srgbClr val="0D9488"/>
                 </a:solidFill>
                 <a:latin typeface="맑은 고딕"/>
+                <a:ea typeface="맑은 고딕"/>
+                <a:cs typeface="맑은 고딕"/>
               </a:rPr>
               <a:t>Registry (Docker Hub)</a:t>
             </a:r>
@@ -11372,6 +11626,8 @@
                   <a:srgbClr val="222733"/>
                 </a:solidFill>
                 <a:latin typeface="맑은 고딕"/>
+                <a:ea typeface="맑은 고딕"/>
+                <a:cs typeface="맑은 고딕"/>
               </a:rPr>
               <a:t> – Image를 저장하고 공유하는 저장소</a:t>
             </a:r>
@@ -11451,6 +11707,8 @@
                   <a:srgbClr val="FFFFFF"/>
                 </a:solidFill>
                 <a:latin typeface="맑은 고딕"/>
+                <a:ea typeface="맑은 고딕"/>
+                <a:cs typeface="맑은 고딕"/>
               </a:rPr>
               <a:t>🥞  비유로 이해하기</a:t>
             </a:r>
@@ -11486,6 +11744,8 @@
                   <a:srgbClr val="FFFFFF"/>
                 </a:solidFill>
                 <a:latin typeface="맑은 고딕"/>
+                <a:ea typeface="맑은 고딕"/>
+                <a:cs typeface="맑은 고딕"/>
               </a:rPr>
               <a:t>Image = 붕어빵 틀 (설계도)   /   Container = 실제로 구워진 붕어빵</a:t>
             </a:r>
@@ -11498,6 +11758,8 @@
                   <a:srgbClr val="FFFFFF"/>
                 </a:solidFill>
                 <a:latin typeface="맑은 고딕"/>
+                <a:ea typeface="맑은 고딕"/>
+                <a:cs typeface="맑은 고딕"/>
               </a:rPr>
               <a:t>→ 같은 틀(Image) 하나로 여러 개의 붕어빵(Container)을 동시에 구울 수 있다</a:t>
             </a:r>
@@ -11533,6 +11795,8 @@
                   <a:srgbClr val="5B6373"/>
                 </a:solidFill>
                 <a:latin typeface="맑은 고딕"/>
+                <a:ea typeface="맑은 고딕"/>
+                <a:cs typeface="맑은 고딕"/>
               </a:rPr>
               <a:t>클라우드인프라관리  ·  1주차 2차시</a:t>
             </a:r>
@@ -11568,6 +11832,8 @@
                   <a:srgbClr val="5B6373"/>
                 </a:solidFill>
                 <a:latin typeface="맑은 고딕"/>
+                <a:ea typeface="맑은 고딕"/>
+                <a:cs typeface="맑은 고딕"/>
               </a:rPr>
               <a:t>08 / 11</a:t>
             </a:r>
@@ -11771,6 +12037,8 @@
                   <a:srgbClr val="14213D"/>
                 </a:solidFill>
                 <a:latin typeface="맑은 고딕"/>
+                <a:ea typeface="맑은 고딕"/>
+                <a:cs typeface="맑은 고딕"/>
               </a:rPr>
               <a:t>03</a:t>
             </a:r>
@@ -11806,6 +12074,8 @@
                   <a:srgbClr val="14B8A6"/>
                 </a:solidFill>
                 <a:latin typeface="맑은 고딕"/>
+                <a:ea typeface="맑은 고딕"/>
+                <a:cs typeface="맑은 고딕"/>
               </a:rPr>
               <a:t>실습 안내</a:t>
             </a:r>
@@ -11841,6 +12111,8 @@
                   <a:srgbClr val="FFFFFF"/>
                 </a:solidFill>
                 <a:latin typeface="맑은 고딕"/>
+                <a:ea typeface="맑은 고딕"/>
+                <a:cs typeface="맑은 고딕"/>
               </a:rPr>
               <a:t>Killercoda 소개 &amp; 오늘 실행할 명령어</a:t>
             </a:r>
@@ -11880,6 +12152,8 @@
                   <a:srgbClr val="0D9488"/>
                 </a:solidFill>
                 <a:latin typeface="맑은 고딕"/>
+                <a:ea typeface="맑은 고딕"/>
+                <a:cs typeface="맑은 고딕"/>
               </a:rPr>
               <a:t>●  </a:t>
             </a:r>
@@ -11889,6 +12163,8 @@
                   <a:srgbClr val="222733"/>
                 </a:solidFill>
                 <a:latin typeface="맑은 고딕"/>
+                <a:ea typeface="맑은 고딕"/>
+                <a:cs typeface="맑은 고딕"/>
               </a:rPr>
               <a:t>브라우저에서 바로 실습, </a:t>
             </a:r>
@@ -11898,6 +12174,8 @@
                   <a:srgbClr val="0D9488"/>
                 </a:solidFill>
                 <a:latin typeface="맑은 고딕"/>
+                <a:ea typeface="맑은 고딕"/>
+                <a:cs typeface="맑은 고딕"/>
               </a:rPr>
               <a:t>설치 불필요</a:t>
             </a:r>
@@ -11907,6 +12185,8 @@
                   <a:srgbClr val="222733"/>
                 </a:solidFill>
                 <a:latin typeface="맑은 고딕"/>
+                <a:ea typeface="맑은 고딕"/>
+                <a:cs typeface="맑은 고딕"/>
               </a:rPr>
               <a:t> (이미 Docker 설치된 상태로 제공)</a:t>
             </a:r>
@@ -11923,6 +12203,8 @@
                   <a:srgbClr val="DC2626"/>
                 </a:solidFill>
                 <a:latin typeface="맑은 고딕"/>
+                <a:ea typeface="맑은 고딕"/>
+                <a:cs typeface="맑은 고딕"/>
               </a:rPr>
               <a:t>●  </a:t>
             </a:r>
@@ -11932,6 +12214,8 @@
                   <a:srgbClr val="DC2626"/>
                 </a:solidFill>
                 <a:latin typeface="맑은 고딕"/>
+                <a:ea typeface="맑은 고딕"/>
+                <a:cs typeface="맑은 고딕"/>
               </a:rPr>
               <a:t>60분 시간 제한</a:t>
             </a:r>
@@ -11941,6 +12225,8 @@
                   <a:srgbClr val="222733"/>
                 </a:solidFill>
                 <a:latin typeface="맑은 고딕"/>
+                <a:ea typeface="맑은 고딕"/>
+                <a:cs typeface="맑은 고딕"/>
               </a:rPr>
               <a:t>이 있음</a:t>
             </a:r>
@@ -11957,6 +12243,8 @@
                   <a:srgbClr val="0D9488"/>
                 </a:solidFill>
                 <a:latin typeface="맑은 고딕"/>
+                <a:ea typeface="맑은 고딕"/>
+                <a:cs typeface="맑은 고딕"/>
               </a:rPr>
               <a:t>●  </a:t>
             </a:r>
@@ -11966,6 +12254,8 @@
                   <a:srgbClr val="222733"/>
                 </a:solidFill>
                 <a:latin typeface="맑은 고딕"/>
+                <a:ea typeface="맑은 고딕"/>
+                <a:cs typeface="맑은 고딕"/>
               </a:rPr>
               <a:t>docker run hello-world — 첫 컨테이너 실행</a:t>
             </a:r>
@@ -11982,6 +12272,8 @@
                   <a:srgbClr val="0D9488"/>
                 </a:solidFill>
                 <a:latin typeface="맑은 고딕"/>
+                <a:ea typeface="맑은 고딕"/>
+                <a:cs typeface="맑은 고딕"/>
               </a:rPr>
               <a:t>●  </a:t>
             </a:r>
@@ -11991,6 +12283,8 @@
                   <a:srgbClr val="222733"/>
                 </a:solidFill>
                 <a:latin typeface="맑은 고딕"/>
+                <a:ea typeface="맑은 고딕"/>
+                <a:cs typeface="맑은 고딕"/>
               </a:rPr>
               <a:t>docker images — 받아진 이미지 확인 (내 붕어빵 틀 목록)</a:t>
             </a:r>
@@ -12007,6 +12301,8 @@
                   <a:srgbClr val="0D9488"/>
                 </a:solidFill>
                 <a:latin typeface="맑은 고딕"/>
+                <a:ea typeface="맑은 고딕"/>
+                <a:cs typeface="맑은 고딕"/>
               </a:rPr>
               <a:t>●  </a:t>
             </a:r>
@@ -12016,6 +12312,8 @@
                   <a:srgbClr val="222733"/>
                 </a:solidFill>
                 <a:latin typeface="맑은 고딕"/>
+                <a:ea typeface="맑은 고딕"/>
+                <a:cs typeface="맑은 고딕"/>
               </a:rPr>
               <a:t>docker ps -a — 실행된 컨테이너 목록 확인 (구워진 붕어빵 목록)</a:t>
             </a:r>
@@ -12051,6 +12349,8 @@
                   <a:srgbClr val="5B6373"/>
                 </a:solidFill>
                 <a:latin typeface="맑은 고딕"/>
+                <a:ea typeface="맑은 고딕"/>
+                <a:cs typeface="맑은 고딕"/>
               </a:rPr>
               <a:t>클라우드인프라관리  ·  1주차 2차시</a:t>
             </a:r>
@@ -12086,6 +12386,8 @@
                   <a:srgbClr val="5B6373"/>
                 </a:solidFill>
                 <a:latin typeface="맑은 고딕"/>
+                <a:ea typeface="맑은 고딕"/>
+                <a:cs typeface="맑은 고딕"/>
               </a:rPr>
               <a:t>09 / 11</a:t>
             </a:r>

--- a/class/cloud_infra_mgmt/01주차_클라우드개념_Docker입문/01_강의자료/2차시_컨테이너와Docker아키텍처.pptx
+++ b/class/cloud_infra_mgmt/01주차_클라우드개념_Docker입문/01_강의자료/2차시_컨테이너와Docker아키텍처.pptx
@@ -5411,7 +5411,7 @@
                 <a:ea typeface="맑은 고딕"/>
                 <a:cs typeface="맑은 고딕"/>
               </a:rPr>
-              <a:t>10 / 11</a:t>
+              <a:t>10 / 12</a:t>
             </a:r>
           </a:p>
         </p:txBody>
@@ -6436,7 +6436,7 @@
                 <a:ea typeface="맑은 고딕"/>
                 <a:cs typeface="맑은 고딕"/>
               </a:rPr>
-              <a:t>02 / 11</a:t>
+              <a:t>02 / 12</a:t>
             </a:r>
           </a:p>
         </p:txBody>
@@ -7694,7 +7694,7 @@
                 <a:ea typeface="맑은 고딕"/>
                 <a:cs typeface="맑은 고딕"/>
               </a:rPr>
-              <a:t>03 / 11</a:t>
+              <a:t>03 / 12</a:t>
             </a:r>
           </a:p>
         </p:txBody>
@@ -8878,7 +8878,7 @@
                 <a:ea typeface="맑은 고딕"/>
                 <a:cs typeface="맑은 고딕"/>
               </a:rPr>
-              <a:t>05 / 11</a:t>
+              <a:t>05 / 12</a:t>
             </a:r>
           </a:p>
         </p:txBody>
@@ -10932,7 +10932,7 @@
                 <a:ea typeface="맑은 고딕"/>
                 <a:cs typeface="맑은 고딕"/>
               </a:rPr>
-              <a:t>06 / 11</a:t>
+              <a:t>06 / 12</a:t>
             </a:r>
           </a:p>
         </p:txBody>
@@ -11835,7 +11835,7 @@
                 <a:ea typeface="맑은 고딕"/>
                 <a:cs typeface="맑은 고딕"/>
               </a:rPr>
-              <a:t>08 / 11</a:t>
+              <a:t>08 / 12</a:t>
             </a:r>
           </a:p>
         </p:txBody>
@@ -12389,7 +12389,7 @@
                 <a:ea typeface="맑은 고딕"/>
                 <a:cs typeface="맑은 고딕"/>
               </a:rPr>
-              <a:t>09 / 11</a:t>
+              <a:t>09 / 12</a:t>
             </a:r>
           </a:p>
         </p:txBody>
